--- a/Schools_ML_Track/camp_2026/slides/ML/F03.pptx
+++ b/Schools_ML_Track/camp_2026/slides/ML/F03.pptx
@@ -118,7 +118,7 @@
   <p:extLst>
     <p:ext uri="{521415D9-36F7-43E2-AB2F-B90AF26B5E84}">
       <p14:sectionLst xmlns:p14="http://schemas.microsoft.com/office/powerpoint/2010/main">
-        <p14:section name="Opening" id="{9e72631b-3cef-623c-816b-f238f46a184b}">
+        <p14:section name="Opening" id="{7ceee5d6-021e-65b6-8528-121d6945f290}">
           <p14:sldIdLst>
             <p14:sldId id="256"/>
             <p14:sldId id="257"/>
@@ -127,7 +127,7 @@
             <p14:sldId id="260"/>
           </p14:sldIdLst>
         </p14:section>
-        <p14:section name="Block A" id="{084ed046-453d-dea8-8308-7df53c0204ef}">
+        <p14:section name="Block A" id="{1d932e64-94d5-c1c1-5726-ae7118ef6c78}">
           <p14:sldIdLst>
             <p14:sldId id="261"/>
             <p14:sldId id="262"/>
@@ -135,7 +135,7 @@
             <p14:sldId id="264"/>
           </p14:sldIdLst>
         </p14:section>
-        <p14:section name="Make and close" id="{ed2472c4-ec08-71b6-127d-1a8347d61a26}">
+        <p14:section name="Make and close" id="{6e2e00a3-2369-aee0-4318-43fe50346889}">
           <p14:sldIdLst>
             <p14:sldId id="265"/>
             <p14:sldId id="266"/>

--- a/Schools_ML_Track/camp_2026/slides/ML/F03.pptx
+++ b/Schools_ML_Track/camp_2026/slides/ML/F03.pptx
@@ -118,7 +118,7 @@
   <p:extLst>
     <p:ext uri="{521415D9-36F7-43E2-AB2F-B90AF26B5E84}">
       <p14:sectionLst xmlns:p14="http://schemas.microsoft.com/office/powerpoint/2010/main">
-        <p14:section name="Opening" id="{7ceee5d6-021e-65b6-8528-121d6945f290}">
+        <p14:section name="Opening" id="{c66afd83-0b78-35d4-45b1-ed931c0e7224}">
           <p14:sldIdLst>
             <p14:sldId id="256"/>
             <p14:sldId id="257"/>
@@ -127,7 +127,7 @@
             <p14:sldId id="260"/>
           </p14:sldIdLst>
         </p14:section>
-        <p14:section name="Block A" id="{1d932e64-94d5-c1c1-5726-ae7118ef6c78}">
+        <p14:section name="Block A" id="{662ee4a7-1093-abfe-e576-797f759f14ba}">
           <p14:sldIdLst>
             <p14:sldId id="261"/>
             <p14:sldId id="262"/>
@@ -135,7 +135,7 @@
             <p14:sldId id="264"/>
           </p14:sldIdLst>
         </p14:section>
-        <p14:section name="Make and close" id="{6e2e00a3-2369-aee0-4318-43fe50346889}">
+        <p14:section name="Make and close" id="{607a6051-0c03-08e6-61ef-130c229b9a22}">
           <p14:sldIdLst>
             <p14:sldId id="265"/>
             <p14:sldId id="266"/>
@@ -2271,7 +2271,24 @@
                 <a:ea typeface="Lato" pitchFamily="34" charset="-122"/>
                 <a:cs typeface="Lato" pitchFamily="34" charset="-120"/>
               </a:rPr>
-              <a:t>Variation, proportions and probability</a:t>
+              <a:t>Variation, proportions</a:t>
+            </a:r>
+            <a:endParaRPr lang="en-US" sz="5600" dirty="0"/>
+          </a:p>
+          <a:p>
+            <a:pPr algn="l" indent="0" marL="0">
+              <a:buNone/>
+            </a:pPr>
+            <a:r>
+              <a:rPr lang="en-US" sz="5600" b="1" dirty="0">
+                <a:solidFill>
+                  <a:srgbClr val="FFFFFF"/>
+                </a:solidFill>
+                <a:latin typeface="Lato" pitchFamily="34" charset="0"/>
+                <a:ea typeface="Lato" pitchFamily="34" charset="-122"/>
+                <a:cs typeface="Lato" pitchFamily="34" charset="-120"/>
+              </a:rPr>
+              <a:t>and probability</a:t>
             </a:r>
             <a:endParaRPr lang="en-US" sz="5600" dirty="0"/>
           </a:p>
@@ -2470,15 +2487,15 @@
           <a:p>
             <a:pPr algn="l" indent="0" marL="0">
               <a:lnSpc>
-                <a:spcPts val="3480"/>
+                <a:spcPts val="3000"/>
               </a:lnSpc>
               <a:spcAft>
-                <a:spcPts val="2520"/>
+                <a:spcPts val="2020"/>
               </a:spcAft>
               <a:buNone/>
             </a:pPr>
             <a:r>
-              <a:rPr lang="en-US" sz="2900" dirty="0">
+              <a:rPr lang="en-US" sz="2500" dirty="0">
                 <a:solidFill>
                   <a:srgbClr val="111111"/>
                 </a:solidFill>
@@ -2486,22 +2503,22 @@
                 <a:ea typeface="Lato" pitchFamily="34" charset="-122"/>
                 <a:cs typeface="Lato" pitchFamily="34" charset="-120"/>
               </a:rPr>
-              <a:t>Repeat for [1, 1, 5, 5]. Explain the mean and spread in words. A bag has 3 blue and 2 red counters. State the chance of blue and its percentage, assuming each counter is equally likely. Save F03.ipynb.</a:t>
-            </a:r>
-            <a:endParaRPr lang="en-US" sz="2900" dirty="0"/>
+              <a:t>Repeat for [1, 1, 5, 5].</a:t>
+            </a:r>
+            <a:endParaRPr lang="en-US" sz="2500" dirty="0"/>
           </a:p>
           <a:p>
             <a:pPr algn="l" indent="0" marL="0">
               <a:lnSpc>
-                <a:spcPts val="3480"/>
+                <a:spcPts val="3000"/>
               </a:lnSpc>
               <a:spcAft>
-                <a:spcPts val="2520"/>
+                <a:spcPts val="2020"/>
               </a:spcAft>
               <a:buNone/>
             </a:pPr>
             <a:r>
-              <a:rPr lang="en-US" sz="2900" dirty="0">
+              <a:rPr lang="en-US" sz="2500" dirty="0">
                 <a:solidFill>
                   <a:srgbClr val="111111"/>
                 </a:solidFill>
@@ -2509,9 +2526,101 @@
                 <a:ea typeface="Lato" pitchFamily="34" charset="-122"/>
                 <a:cs typeface="Lato" pitchFamily="34" charset="-120"/>
               </a:rPr>
-              <a:t>Save it as F03. Write two sentences: what you changed and how you checked it.</a:t>
-            </a:r>
-            <a:endParaRPr lang="en-US" sz="2900" dirty="0"/>
+              <a:t>Explain the mean and spread in words.</a:t>
+            </a:r>
+            <a:endParaRPr lang="en-US" sz="2500" dirty="0"/>
+          </a:p>
+          <a:p>
+            <a:pPr algn="l" indent="0" marL="0">
+              <a:lnSpc>
+                <a:spcPts val="3000"/>
+              </a:lnSpc>
+              <a:spcAft>
+                <a:spcPts val="2020"/>
+              </a:spcAft>
+              <a:buNone/>
+            </a:pPr>
+            <a:r>
+              <a:rPr lang="en-US" sz="2500" dirty="0">
+                <a:solidFill>
+                  <a:srgbClr val="111111"/>
+                </a:solidFill>
+                <a:latin typeface="Lato" pitchFamily="34" charset="0"/>
+                <a:ea typeface="Lato" pitchFamily="34" charset="-122"/>
+                <a:cs typeface="Lato" pitchFamily="34" charset="-120"/>
+              </a:rPr>
+              <a:t>A bag has 3 blue and 2 red counters.</a:t>
+            </a:r>
+            <a:endParaRPr lang="en-US" sz="2500" dirty="0"/>
+          </a:p>
+          <a:p>
+            <a:pPr algn="l" indent="0" marL="0">
+              <a:lnSpc>
+                <a:spcPts val="3000"/>
+              </a:lnSpc>
+              <a:spcAft>
+                <a:spcPts val="2020"/>
+              </a:spcAft>
+              <a:buNone/>
+            </a:pPr>
+            <a:r>
+              <a:rPr lang="en-US" sz="2500" dirty="0">
+                <a:solidFill>
+                  <a:srgbClr val="111111"/>
+                </a:solidFill>
+                <a:latin typeface="Lato" pitchFamily="34" charset="0"/>
+                <a:ea typeface="Lato" pitchFamily="34" charset="-122"/>
+                <a:cs typeface="Lato" pitchFamily="34" charset="-120"/>
+              </a:rPr>
+              <a:t>State the chance of blue and its percentage, assuming each counter is equally likely.</a:t>
+            </a:r>
+            <a:endParaRPr lang="en-US" sz="2500" dirty="0"/>
+          </a:p>
+          <a:p>
+            <a:pPr algn="l" indent="0" marL="0">
+              <a:lnSpc>
+                <a:spcPts val="3000"/>
+              </a:lnSpc>
+              <a:spcAft>
+                <a:spcPts val="2020"/>
+              </a:spcAft>
+              <a:buNone/>
+            </a:pPr>
+            <a:r>
+              <a:rPr lang="en-US" sz="2500" dirty="0">
+                <a:solidFill>
+                  <a:srgbClr val="111111"/>
+                </a:solidFill>
+                <a:latin typeface="Lato" pitchFamily="34" charset="0"/>
+                <a:ea typeface="Lato" pitchFamily="34" charset="-122"/>
+                <a:cs typeface="Lato" pitchFamily="34" charset="-120"/>
+              </a:rPr>
+              <a:t>Save F03.ipynb.</a:t>
+            </a:r>
+            <a:endParaRPr lang="en-US" sz="2500" dirty="0"/>
+          </a:p>
+          <a:p>
+            <a:pPr algn="l" indent="0" marL="0">
+              <a:lnSpc>
+                <a:spcPts val="3000"/>
+              </a:lnSpc>
+              <a:spcAft>
+                <a:spcPts val="2020"/>
+              </a:spcAft>
+              <a:buNone/>
+            </a:pPr>
+            <a:r>
+              <a:rPr lang="en-US" sz="2500" dirty="0">
+                <a:solidFill>
+                  <a:srgbClr val="111111"/>
+                </a:solidFill>
+                <a:latin typeface="Lato" pitchFamily="34" charset="0"/>
+                <a:ea typeface="Lato" pitchFamily="34" charset="-122"/>
+                <a:cs typeface="Lato" pitchFamily="34" charset="-120"/>
+              </a:rPr>
+              <a:t>Write two sentences: what you changed and how you checked it.</a:t>
+            </a:r>
+            <a:endParaRPr lang="en-US" sz="2500" dirty="0"/>
           </a:p>
         </p:txBody>
       </p:sp>
@@ -6010,281 +6119,30 @@
           </a:p>
         </p:txBody>
       </p:sp>
-      <p:sp>
-        <p:nvSpPr>
-          <p:cNvPr id="4" name="Shape 2"/>
-          <p:cNvSpPr/>
+      <p:pic>
+        <p:nvPicPr>
+          <p:cNvPr id="4" name="Image 0" descr="Change one thing">    </p:cNvPr>
+          <p:cNvPicPr>
+            <a:picLocks noChangeAspect="1"/>
+          </p:cNvPicPr>
           <p:nvPr/>
-        </p:nvSpPr>
-        <p:spPr>
-          <a:xfrm>
-            <a:off x="7223760" y="1737360"/>
-            <a:ext cx="4297680" cy="2519172"/>
-          </a:xfrm>
-          <a:prstGeom prst="roundRect">
-            <a:avLst>
-              <a:gd name="adj" fmla="val 2904"/>
-            </a:avLst>
-          </a:prstGeom>
-          <a:solidFill>
-            <a:srgbClr val="111111"/>
-          </a:solidFill>
-          <a:ln/>
-        </p:spPr>
-      </p:sp>
-      <p:sp>
-        <p:nvSpPr>
-          <p:cNvPr id="5" name="Text 3"/>
-          <p:cNvSpPr txBox="1"/>
-          <p:nvPr/>
-        </p:nvSpPr>
-        <p:spPr>
-          <a:xfrm>
-            <a:off x="7424928" y="1938528"/>
-            <a:ext cx="3895344" cy="2116836"/>
-          </a:xfrm>
-          <a:prstGeom prst="rect">
-            <a:avLst/>
-          </a:prstGeom>
-          <a:noFill/>
-          <a:ln/>
-        </p:spPr>
-        <p:txBody>
-          <a:bodyPr wrap="square" lIns="0" tIns="0" rIns="0" bIns="0" rtlCol="0" anchor="t"/>
-          <a:lstStyle/>
-          <a:p>
-            <a:pPr algn="l" indent="0" marL="0">
-              <a:lnSpc>
-                <a:spcPts val="1820"/>
-              </a:lnSpc>
-              <a:buNone/>
-            </a:pPr>
-            <a:r>
-              <a:rPr lang="en-US" sz="1400" b="1" dirty="0">
-                <a:solidFill>
-                  <a:srgbClr val="FFFFFF"/>
-                </a:solidFill>
-                <a:latin typeface="Courier New" pitchFamily="34" charset="0"/>
-                <a:ea typeface="Courier New" pitchFamily="34" charset="-122"/>
-                <a:cs typeface="Courier New" pitchFamily="34" charset="-120"/>
-              </a:rPr>
-              <a:t>import</a:t>
-            </a:r>
-            <a:pPr algn="l" indent="0" marL="0">
-              <a:lnSpc>
-                <a:spcPts val="1820"/>
-              </a:lnSpc>
-              <a:buNone/>
-            </a:pPr>
-            <a:r>
-              <a:rPr lang="en-US" sz="1400" dirty="0">
-                <a:solidFill>
-                  <a:srgbClr val="FFFFFF"/>
-                </a:solidFill>
-                <a:latin typeface="Courier New" pitchFamily="34" charset="0"/>
-                <a:ea typeface="Courier New" pitchFamily="34" charset="-122"/>
-                <a:cs typeface="Courier New" pitchFamily="34" charset="-120"/>
-              </a:rPr>
-              <a:t> numpy </a:t>
-            </a:r>
-            <a:pPr algn="l" indent="0" marL="0">
-              <a:lnSpc>
-                <a:spcPts val="1820"/>
-              </a:lnSpc>
-              <a:buNone/>
-            </a:pPr>
-            <a:r>
-              <a:rPr lang="en-US" sz="1400" b="1" dirty="0">
-                <a:solidFill>
-                  <a:srgbClr val="FFFFFF"/>
-                </a:solidFill>
-                <a:latin typeface="Courier New" pitchFamily="34" charset="0"/>
-                <a:ea typeface="Courier New" pitchFamily="34" charset="-122"/>
-                <a:cs typeface="Courier New" pitchFamily="34" charset="-120"/>
-              </a:rPr>
-              <a:t>as</a:t>
-            </a:r>
-            <a:pPr algn="l" indent="0" marL="0">
-              <a:lnSpc>
-                <a:spcPts val="1820"/>
-              </a:lnSpc>
-              <a:buNone/>
-            </a:pPr>
-            <a:r>
-              <a:rPr lang="en-US" sz="1400" dirty="0">
-                <a:solidFill>
-                  <a:srgbClr val="FFFFFF"/>
-                </a:solidFill>
-                <a:latin typeface="Courier New" pitchFamily="34" charset="0"/>
-                <a:ea typeface="Courier New" pitchFamily="34" charset="-122"/>
-                <a:cs typeface="Courier New" pitchFamily="34" charset="-120"/>
-              </a:rPr>
-              <a:t> np</a:t>
-            </a:r>
-            <a:endParaRPr lang="en-US" sz="1400" dirty="0"/>
-          </a:p>
-          <a:p>
-            <a:pPr algn="l" indent="0" marL="0">
-              <a:lnSpc>
-                <a:spcPts val="1820"/>
-              </a:lnSpc>
-              <a:buNone/>
-            </a:pPr>
-            <a:r>
-              <a:rPr lang="en-US" sz="1400" dirty="0">
-                <a:solidFill>
-                  <a:srgbClr val="FFFFFF"/>
-                </a:solidFill>
-                <a:latin typeface="Courier New" pitchFamily="34" charset="0"/>
-                <a:ea typeface="Courier New" pitchFamily="34" charset="-122"/>
-                <a:cs typeface="Courier New" pitchFamily="34" charset="-120"/>
-              </a:rPr>
-              <a:t>values = np.array([2, 2, 6, 6])</a:t>
-            </a:r>
-            <a:endParaRPr lang="en-US" sz="1400" dirty="0"/>
-          </a:p>
-          <a:p>
-            <a:pPr algn="l" indent="0" marL="0">
-              <a:lnSpc>
-                <a:spcPts val="1820"/>
-              </a:lnSpc>
-              <a:buNone/>
-            </a:pPr>
-            <a:r>
-              <a:rPr lang="en-US" sz="1400" dirty="0">
-                <a:solidFill>
-                  <a:srgbClr val="FFFFFF"/>
-                </a:solidFill>
-                <a:latin typeface="Courier New" pitchFamily="34" charset="0"/>
-                <a:ea typeface="Courier New" pitchFamily="34" charset="-122"/>
-                <a:cs typeface="Courier New" pitchFamily="34" charset="-120"/>
-              </a:rPr>
-              <a:t>mean = values.mean()</a:t>
-            </a:r>
-            <a:endParaRPr lang="en-US" sz="1400" dirty="0"/>
-          </a:p>
-          <a:p>
-            <a:pPr algn="l" indent="0" marL="0">
-              <a:lnSpc>
-                <a:spcPts val="1820"/>
-              </a:lnSpc>
-              <a:buNone/>
-            </a:pPr>
-            <a:r>
-              <a:rPr lang="en-US" sz="1400" dirty="0">
-                <a:solidFill>
-                  <a:srgbClr val="FFFFFF"/>
-                </a:solidFill>
-                <a:latin typeface="Courier New" pitchFamily="34" charset="0"/>
-                <a:ea typeface="Courier New" pitchFamily="34" charset="-122"/>
-                <a:cs typeface="Courier New" pitchFamily="34" charset="-120"/>
-              </a:rPr>
-              <a:t>deviations = values - mean</a:t>
-            </a:r>
-            <a:endParaRPr lang="en-US" sz="1400" dirty="0"/>
-          </a:p>
-          <a:p>
-            <a:pPr algn="l" indent="0" marL="0">
-              <a:lnSpc>
-                <a:spcPts val="1820"/>
-              </a:lnSpc>
-              <a:buNone/>
-            </a:pPr>
-            <a:r>
-              <a:rPr lang="en-US" sz="1400" dirty="0">
-                <a:solidFill>
-                  <a:srgbClr val="FFFFFF"/>
-                </a:solidFill>
-                <a:latin typeface="Courier New" pitchFamily="34" charset="0"/>
-                <a:ea typeface="Courier New" pitchFamily="34" charset="-122"/>
-                <a:cs typeface="Courier New" pitchFamily="34" charset="-120"/>
-              </a:rPr>
-              <a:t>spread = values.std()</a:t>
-            </a:r>
-            <a:endParaRPr lang="en-US" sz="1400" dirty="0"/>
-          </a:p>
-          <a:p>
-            <a:pPr algn="l" indent="0" marL="0">
-              <a:lnSpc>
-                <a:spcPts val="1820"/>
-              </a:lnSpc>
-              <a:buNone/>
-            </a:pPr>
-            <a:r>
-              <a:rPr lang="en-US" sz="1400" dirty="0">
-                <a:solidFill>
-                  <a:srgbClr val="FFFFFF"/>
-                </a:solidFill>
-                <a:latin typeface="Courier New" pitchFamily="34" charset="0"/>
-                <a:ea typeface="Courier New" pitchFamily="34" charset="-122"/>
-                <a:cs typeface="Courier New" pitchFamily="34" charset="-120"/>
-              </a:rPr>
-              <a:t>steady = np.array([4, 4, 4, 4])</a:t>
-            </a:r>
-            <a:endParaRPr lang="en-US" sz="1400" dirty="0"/>
-          </a:p>
-          <a:p>
-            <a:pPr algn="l" indent="0" marL="0">
-              <a:lnSpc>
-                <a:spcPts val="1820"/>
-              </a:lnSpc>
-              <a:buNone/>
-            </a:pPr>
-            <a:r>
-              <a:rPr lang="en-US" sz="1400" dirty="0">
-                <a:solidFill>
-                  <a:srgbClr val="FFFFFF"/>
-                </a:solidFill>
-                <a:latin typeface="Courier New" pitchFamily="34" charset="0"/>
-                <a:ea typeface="Courier New" pitchFamily="34" charset="-122"/>
-                <a:cs typeface="Courier New" pitchFamily="34" charset="-120"/>
-              </a:rPr>
-              <a:t>print(mean, deviations, spread)</a:t>
-            </a:r>
-            <a:endParaRPr lang="en-US" sz="1400" dirty="0"/>
-          </a:p>
-          <a:p>
-            <a:pPr algn="l" indent="0" marL="0">
-              <a:lnSpc>
-                <a:spcPts val="1820"/>
-              </a:lnSpc>
-              <a:buNone/>
-            </a:pPr>
-            <a:r>
-              <a:rPr lang="en-US" sz="1400" dirty="0">
-                <a:solidFill>
-                  <a:srgbClr val="FFFFFF"/>
-                </a:solidFill>
-                <a:latin typeface="Courier New" pitchFamily="34" charset="0"/>
-                <a:ea typeface="Courier New" pitchFamily="34" charset="-122"/>
-                <a:cs typeface="Courier New" pitchFamily="34" charset="-120"/>
-              </a:rPr>
-              <a:t>print(steady.mean(), steady.std())</a:t>
-            </a:r>
-            <a:endParaRPr lang="en-US" sz="1400" dirty="0"/>
-          </a:p>
-          <a:p>
-            <a:pPr algn="l" indent="0" marL="0">
-              <a:lnSpc>
-                <a:spcPts val="1820"/>
-              </a:lnSpc>
-              <a:buNone/>
-            </a:pPr>
-            <a:r>
-              <a:rPr lang="en-US" sz="1400" dirty="0">
-                <a:solidFill>
-                  <a:srgbClr val="FFFFFF"/>
-                </a:solidFill>
-                <a:latin typeface="Courier New" pitchFamily="34" charset="0"/>
-                <a:ea typeface="Courier New" pitchFamily="34" charset="-122"/>
-                <a:cs typeface="Courier New" pitchFamily="34" charset="-120"/>
-              </a:rPr>
-              <a:t>print(2 / 6, 2 / 6 * 100)</a:t>
-            </a:r>
-            <a:endParaRPr lang="en-US" sz="1400" dirty="0"/>
-          </a:p>
-        </p:txBody>
-      </p:sp>
+        </p:nvPicPr>
+        <p:blipFill>
+          <a:blip r:embed="rId1"/>
+          <a:stretch>
+            <a:fillRect/>
+          </a:stretch>
+        </p:blipFill>
+        <p:spPr>
+          <a:xfrm>
+            <a:off x="9418320" y="2103120"/>
+            <a:ext cx="1828800" cy="1828800"/>
+          </a:xfrm>
+          <a:prstGeom prst="rect">
+            <a:avLst/>
+          </a:prstGeom>
+        </p:spPr>
+      </p:pic>
       <p:sp>
         <p:nvSpPr>
           <p:cNvPr id="25" name="Slide Number Placeholder 0"/>
